--- a/問我主恩有幾多.pptx
+++ b/問我主恩有幾多.pptx
@@ -175,7 +175,7 @@
           <a:lstStyle/>
           <a:p>
             <a:r>
-              <a:rPr lang="en-US" altLang="zh-TW" smtClean="0"/>
+              <a:rPr lang="en-US" altLang="zh-TW"/>
               <a:t>Click to edit Master title style</a:t>
             </a:r>
             <a:endParaRPr lang="zh-TW" altLang="en-US"/>
@@ -294,7 +294,7 @@
           </a:lstStyle>
           <a:p>
             <a:r>
-              <a:rPr lang="en-US" altLang="zh-TW" smtClean="0"/>
+              <a:rPr lang="en-US" altLang="zh-TW"/>
               <a:t>Click to edit Master subtitle style</a:t>
             </a:r>
             <a:endParaRPr lang="zh-TW" altLang="en-US"/>
@@ -319,7 +319,7 @@
             <a:fld id="{9898E65E-5E56-4F09-9AEE-13AF2F5B087E}" type="datetimeFigureOut">
               <a:rPr lang="en-US" smtClean="0"/>
               <a:pPr/>
-              <a:t>11/26/2022</a:t>
+              <a:t>11/23/2024</a:t>
             </a:fld>
             <a:endParaRPr lang="en-US"/>
           </a:p>
@@ -414,7 +414,7 @@
           <a:lstStyle/>
           <a:p>
             <a:r>
-              <a:rPr lang="en-US" altLang="zh-TW" smtClean="0"/>
+              <a:rPr lang="en-US" altLang="zh-TW"/>
               <a:t>Click to edit Master title style</a:t>
             </a:r>
             <a:endParaRPr lang="zh-TW" altLang="en-US"/>
@@ -438,35 +438,35 @@
           <a:p>
             <a:pPr lvl="0"/>
             <a:r>
-              <a:rPr lang="en-US" altLang="zh-TW" smtClean="0"/>
+              <a:rPr lang="en-US" altLang="zh-TW"/>
               <a:t>Edit Master text styles</a:t>
             </a:r>
           </a:p>
           <a:p>
             <a:pPr lvl="1"/>
             <a:r>
-              <a:rPr lang="en-US" altLang="zh-TW" smtClean="0"/>
+              <a:rPr lang="en-US" altLang="zh-TW"/>
               <a:t>Second level</a:t>
             </a:r>
           </a:p>
           <a:p>
             <a:pPr lvl="2"/>
             <a:r>
-              <a:rPr lang="en-US" altLang="zh-TW" smtClean="0"/>
+              <a:rPr lang="en-US" altLang="zh-TW"/>
               <a:t>Third level</a:t>
             </a:r>
           </a:p>
           <a:p>
             <a:pPr lvl="3"/>
             <a:r>
-              <a:rPr lang="en-US" altLang="zh-TW" smtClean="0"/>
+              <a:rPr lang="en-US" altLang="zh-TW"/>
               <a:t>Fourth level</a:t>
             </a:r>
           </a:p>
           <a:p>
             <a:pPr lvl="4"/>
             <a:r>
-              <a:rPr lang="en-US" altLang="zh-TW" smtClean="0"/>
+              <a:rPr lang="en-US" altLang="zh-TW"/>
               <a:t>Fifth level</a:t>
             </a:r>
             <a:endParaRPr lang="zh-TW" altLang="en-US"/>
@@ -491,7 +491,7 @@
             <a:fld id="{9898E65E-5E56-4F09-9AEE-13AF2F5B087E}" type="datetimeFigureOut">
               <a:rPr lang="en-US" smtClean="0"/>
               <a:pPr/>
-              <a:t>11/26/2022</a:t>
+              <a:t>11/23/2024</a:t>
             </a:fld>
             <a:endParaRPr lang="en-US"/>
           </a:p>
@@ -591,7 +591,7 @@
           <a:lstStyle/>
           <a:p>
             <a:r>
-              <a:rPr lang="en-US" altLang="zh-TW" smtClean="0"/>
+              <a:rPr lang="en-US" altLang="zh-TW"/>
               <a:t>Click to edit Master title style</a:t>
             </a:r>
             <a:endParaRPr lang="zh-TW" altLang="en-US"/>
@@ -620,35 +620,35 @@
           <a:p>
             <a:pPr lvl="0"/>
             <a:r>
-              <a:rPr lang="en-US" altLang="zh-TW" smtClean="0"/>
+              <a:rPr lang="en-US" altLang="zh-TW"/>
               <a:t>Edit Master text styles</a:t>
             </a:r>
           </a:p>
           <a:p>
             <a:pPr lvl="1"/>
             <a:r>
-              <a:rPr lang="en-US" altLang="zh-TW" smtClean="0"/>
+              <a:rPr lang="en-US" altLang="zh-TW"/>
               <a:t>Second level</a:t>
             </a:r>
           </a:p>
           <a:p>
             <a:pPr lvl="2"/>
             <a:r>
-              <a:rPr lang="en-US" altLang="zh-TW" smtClean="0"/>
+              <a:rPr lang="en-US" altLang="zh-TW"/>
               <a:t>Third level</a:t>
             </a:r>
           </a:p>
           <a:p>
             <a:pPr lvl="3"/>
             <a:r>
-              <a:rPr lang="en-US" altLang="zh-TW" smtClean="0"/>
+              <a:rPr lang="en-US" altLang="zh-TW"/>
               <a:t>Fourth level</a:t>
             </a:r>
           </a:p>
           <a:p>
             <a:pPr lvl="4"/>
             <a:r>
-              <a:rPr lang="en-US" altLang="zh-TW" smtClean="0"/>
+              <a:rPr lang="en-US" altLang="zh-TW"/>
               <a:t>Fifth level</a:t>
             </a:r>
             <a:endParaRPr lang="zh-TW" altLang="en-US"/>
@@ -673,7 +673,7 @@
             <a:fld id="{9898E65E-5E56-4F09-9AEE-13AF2F5B087E}" type="datetimeFigureOut">
               <a:rPr lang="en-US" smtClean="0"/>
               <a:pPr/>
-              <a:t>11/26/2022</a:t>
+              <a:t>11/23/2024</a:t>
             </a:fld>
             <a:endParaRPr lang="en-US"/>
           </a:p>
@@ -768,7 +768,7 @@
           <a:lstStyle/>
           <a:p>
             <a:r>
-              <a:rPr lang="en-US" altLang="zh-TW" smtClean="0"/>
+              <a:rPr lang="en-US" altLang="zh-TW"/>
               <a:t>Click to edit Master title style</a:t>
             </a:r>
             <a:endParaRPr lang="zh-TW" altLang="en-US"/>
@@ -792,35 +792,35 @@
           <a:p>
             <a:pPr lvl="0"/>
             <a:r>
-              <a:rPr lang="en-US" altLang="zh-TW" smtClean="0"/>
+              <a:rPr lang="en-US" altLang="zh-TW"/>
               <a:t>Edit Master text styles</a:t>
             </a:r>
           </a:p>
           <a:p>
             <a:pPr lvl="1"/>
             <a:r>
-              <a:rPr lang="en-US" altLang="zh-TW" smtClean="0"/>
+              <a:rPr lang="en-US" altLang="zh-TW"/>
               <a:t>Second level</a:t>
             </a:r>
           </a:p>
           <a:p>
             <a:pPr lvl="2"/>
             <a:r>
-              <a:rPr lang="en-US" altLang="zh-TW" smtClean="0"/>
+              <a:rPr lang="en-US" altLang="zh-TW"/>
               <a:t>Third level</a:t>
             </a:r>
           </a:p>
           <a:p>
             <a:pPr lvl="3"/>
             <a:r>
-              <a:rPr lang="en-US" altLang="zh-TW" smtClean="0"/>
+              <a:rPr lang="en-US" altLang="zh-TW"/>
               <a:t>Fourth level</a:t>
             </a:r>
           </a:p>
           <a:p>
             <a:pPr lvl="4"/>
             <a:r>
-              <a:rPr lang="en-US" altLang="zh-TW" smtClean="0"/>
+              <a:rPr lang="en-US" altLang="zh-TW"/>
               <a:t>Fifth level</a:t>
             </a:r>
             <a:endParaRPr lang="zh-TW" altLang="en-US"/>
@@ -845,7 +845,7 @@
             <a:fld id="{9898E65E-5E56-4F09-9AEE-13AF2F5B087E}" type="datetimeFigureOut">
               <a:rPr lang="en-US" smtClean="0"/>
               <a:pPr/>
-              <a:t>11/26/2022</a:t>
+              <a:t>11/23/2024</a:t>
             </a:fld>
             <a:endParaRPr lang="en-US"/>
           </a:p>
@@ -949,7 +949,7 @@
           </a:lstStyle>
           <a:p>
             <a:r>
-              <a:rPr lang="en-US" altLang="zh-TW" smtClean="0"/>
+              <a:rPr lang="en-US" altLang="zh-TW"/>
               <a:t>Click to edit Master title style</a:t>
             </a:r>
             <a:endParaRPr lang="zh-TW" altLang="en-US"/>
@@ -1069,7 +1069,7 @@
           <a:p>
             <a:pPr lvl="0"/>
             <a:r>
-              <a:rPr lang="en-US" altLang="zh-TW" smtClean="0"/>
+              <a:rPr lang="en-US" altLang="zh-TW"/>
               <a:t>Edit Master text styles</a:t>
             </a:r>
           </a:p>
@@ -1093,7 +1093,7 @@
             <a:fld id="{9898E65E-5E56-4F09-9AEE-13AF2F5B087E}" type="datetimeFigureOut">
               <a:rPr lang="en-US" smtClean="0"/>
               <a:pPr/>
-              <a:t>11/26/2022</a:t>
+              <a:t>11/23/2024</a:t>
             </a:fld>
             <a:endParaRPr lang="en-US"/>
           </a:p>
@@ -1188,7 +1188,7 @@
           <a:lstStyle/>
           <a:p>
             <a:r>
-              <a:rPr lang="en-US" altLang="zh-TW" smtClean="0"/>
+              <a:rPr lang="en-US" altLang="zh-TW"/>
               <a:t>Click to edit Master title style</a:t>
             </a:r>
             <a:endParaRPr lang="zh-TW" altLang="en-US"/>
@@ -1245,35 +1245,35 @@
           <a:p>
             <a:pPr lvl="0"/>
             <a:r>
-              <a:rPr lang="en-US" altLang="zh-TW" smtClean="0"/>
+              <a:rPr lang="en-US" altLang="zh-TW"/>
               <a:t>Edit Master text styles</a:t>
             </a:r>
           </a:p>
           <a:p>
             <a:pPr lvl="1"/>
             <a:r>
-              <a:rPr lang="en-US" altLang="zh-TW" smtClean="0"/>
+              <a:rPr lang="en-US" altLang="zh-TW"/>
               <a:t>Second level</a:t>
             </a:r>
           </a:p>
           <a:p>
             <a:pPr lvl="2"/>
             <a:r>
-              <a:rPr lang="en-US" altLang="zh-TW" smtClean="0"/>
+              <a:rPr lang="en-US" altLang="zh-TW"/>
               <a:t>Third level</a:t>
             </a:r>
           </a:p>
           <a:p>
             <a:pPr lvl="3"/>
             <a:r>
-              <a:rPr lang="en-US" altLang="zh-TW" smtClean="0"/>
+              <a:rPr lang="en-US" altLang="zh-TW"/>
               <a:t>Fourth level</a:t>
             </a:r>
           </a:p>
           <a:p>
             <a:pPr lvl="4"/>
             <a:r>
-              <a:rPr lang="en-US" altLang="zh-TW" smtClean="0"/>
+              <a:rPr lang="en-US" altLang="zh-TW"/>
               <a:t>Fifth level</a:t>
             </a:r>
             <a:endParaRPr lang="zh-TW" altLang="en-US"/>
@@ -1330,35 +1330,35 @@
           <a:p>
             <a:pPr lvl="0"/>
             <a:r>
-              <a:rPr lang="en-US" altLang="zh-TW" smtClean="0"/>
+              <a:rPr lang="en-US" altLang="zh-TW"/>
               <a:t>Edit Master text styles</a:t>
             </a:r>
           </a:p>
           <a:p>
             <a:pPr lvl="1"/>
             <a:r>
-              <a:rPr lang="en-US" altLang="zh-TW" smtClean="0"/>
+              <a:rPr lang="en-US" altLang="zh-TW"/>
               <a:t>Second level</a:t>
             </a:r>
           </a:p>
           <a:p>
             <a:pPr lvl="2"/>
             <a:r>
-              <a:rPr lang="en-US" altLang="zh-TW" smtClean="0"/>
+              <a:rPr lang="en-US" altLang="zh-TW"/>
               <a:t>Third level</a:t>
             </a:r>
           </a:p>
           <a:p>
             <a:pPr lvl="3"/>
             <a:r>
-              <a:rPr lang="en-US" altLang="zh-TW" smtClean="0"/>
+              <a:rPr lang="en-US" altLang="zh-TW"/>
               <a:t>Fourth level</a:t>
             </a:r>
           </a:p>
           <a:p>
             <a:pPr lvl="4"/>
             <a:r>
-              <a:rPr lang="en-US" altLang="zh-TW" smtClean="0"/>
+              <a:rPr lang="en-US" altLang="zh-TW"/>
               <a:t>Fifth level</a:t>
             </a:r>
             <a:endParaRPr lang="zh-TW" altLang="en-US"/>
@@ -1383,7 +1383,7 @@
             <a:fld id="{9898E65E-5E56-4F09-9AEE-13AF2F5B087E}" type="datetimeFigureOut">
               <a:rPr lang="en-US" smtClean="0"/>
               <a:pPr/>
-              <a:t>11/26/2022</a:t>
+              <a:t>11/23/2024</a:t>
             </a:fld>
             <a:endParaRPr lang="en-US"/>
           </a:p>
@@ -1482,7 +1482,7 @@
           </a:lstStyle>
           <a:p>
             <a:r>
-              <a:rPr lang="en-US" altLang="zh-TW" smtClean="0"/>
+              <a:rPr lang="en-US" altLang="zh-TW"/>
               <a:t>Click to edit Master title style</a:t>
             </a:r>
             <a:endParaRPr lang="zh-TW" altLang="en-US"/>
@@ -1548,7 +1548,7 @@
           <a:p>
             <a:pPr lvl="0"/>
             <a:r>
-              <a:rPr lang="en-US" altLang="zh-TW" smtClean="0"/>
+              <a:rPr lang="en-US" altLang="zh-TW"/>
               <a:t>Edit Master text styles</a:t>
             </a:r>
           </a:p>
@@ -1604,35 +1604,35 @@
           <a:p>
             <a:pPr lvl="0"/>
             <a:r>
-              <a:rPr lang="en-US" altLang="zh-TW" smtClean="0"/>
+              <a:rPr lang="en-US" altLang="zh-TW"/>
               <a:t>Edit Master text styles</a:t>
             </a:r>
           </a:p>
           <a:p>
             <a:pPr lvl="1"/>
             <a:r>
-              <a:rPr lang="en-US" altLang="zh-TW" smtClean="0"/>
+              <a:rPr lang="en-US" altLang="zh-TW"/>
               <a:t>Second level</a:t>
             </a:r>
           </a:p>
           <a:p>
             <a:pPr lvl="2"/>
             <a:r>
-              <a:rPr lang="en-US" altLang="zh-TW" smtClean="0"/>
+              <a:rPr lang="en-US" altLang="zh-TW"/>
               <a:t>Third level</a:t>
             </a:r>
           </a:p>
           <a:p>
             <a:pPr lvl="3"/>
             <a:r>
-              <a:rPr lang="en-US" altLang="zh-TW" smtClean="0"/>
+              <a:rPr lang="en-US" altLang="zh-TW"/>
               <a:t>Fourth level</a:t>
             </a:r>
           </a:p>
           <a:p>
             <a:pPr lvl="4"/>
             <a:r>
-              <a:rPr lang="en-US" altLang="zh-TW" smtClean="0"/>
+              <a:rPr lang="en-US" altLang="zh-TW"/>
               <a:t>Fifth level</a:t>
             </a:r>
             <a:endParaRPr lang="zh-TW" altLang="en-US"/>
@@ -1698,7 +1698,7 @@
           <a:p>
             <a:pPr lvl="0"/>
             <a:r>
-              <a:rPr lang="en-US" altLang="zh-TW" smtClean="0"/>
+              <a:rPr lang="en-US" altLang="zh-TW"/>
               <a:t>Edit Master text styles</a:t>
             </a:r>
           </a:p>
@@ -1754,35 +1754,35 @@
           <a:p>
             <a:pPr lvl="0"/>
             <a:r>
-              <a:rPr lang="en-US" altLang="zh-TW" smtClean="0"/>
+              <a:rPr lang="en-US" altLang="zh-TW"/>
               <a:t>Edit Master text styles</a:t>
             </a:r>
           </a:p>
           <a:p>
             <a:pPr lvl="1"/>
             <a:r>
-              <a:rPr lang="en-US" altLang="zh-TW" smtClean="0"/>
+              <a:rPr lang="en-US" altLang="zh-TW"/>
               <a:t>Second level</a:t>
             </a:r>
           </a:p>
           <a:p>
             <a:pPr lvl="2"/>
             <a:r>
-              <a:rPr lang="en-US" altLang="zh-TW" smtClean="0"/>
+              <a:rPr lang="en-US" altLang="zh-TW"/>
               <a:t>Third level</a:t>
             </a:r>
           </a:p>
           <a:p>
             <a:pPr lvl="3"/>
             <a:r>
-              <a:rPr lang="en-US" altLang="zh-TW" smtClean="0"/>
+              <a:rPr lang="en-US" altLang="zh-TW"/>
               <a:t>Fourth level</a:t>
             </a:r>
           </a:p>
           <a:p>
             <a:pPr lvl="4"/>
             <a:r>
-              <a:rPr lang="en-US" altLang="zh-TW" smtClean="0"/>
+              <a:rPr lang="en-US" altLang="zh-TW"/>
               <a:t>Fifth level</a:t>
             </a:r>
             <a:endParaRPr lang="zh-TW" altLang="en-US"/>
@@ -1807,7 +1807,7 @@
             <a:fld id="{9898E65E-5E56-4F09-9AEE-13AF2F5B087E}" type="datetimeFigureOut">
               <a:rPr lang="en-US" smtClean="0"/>
               <a:pPr/>
-              <a:t>11/26/2022</a:t>
+              <a:t>11/23/2024</a:t>
             </a:fld>
             <a:endParaRPr lang="en-US"/>
           </a:p>
@@ -1902,7 +1902,7 @@
           <a:lstStyle/>
           <a:p>
             <a:r>
-              <a:rPr lang="en-US" altLang="zh-TW" smtClean="0"/>
+              <a:rPr lang="en-US" altLang="zh-TW"/>
               <a:t>Click to edit Master title style</a:t>
             </a:r>
             <a:endParaRPr lang="zh-TW" altLang="en-US"/>
@@ -1927,7 +1927,7 @@
             <a:fld id="{9898E65E-5E56-4F09-9AEE-13AF2F5B087E}" type="datetimeFigureOut">
               <a:rPr lang="en-US" smtClean="0"/>
               <a:pPr/>
-              <a:t>11/26/2022</a:t>
+              <a:t>11/23/2024</a:t>
             </a:fld>
             <a:endParaRPr lang="en-US"/>
           </a:p>
@@ -2024,7 +2024,7 @@
             <a:fld id="{9898E65E-5E56-4F09-9AEE-13AF2F5B087E}" type="datetimeFigureOut">
               <a:rPr lang="en-US" smtClean="0"/>
               <a:pPr/>
-              <a:t>11/26/2022</a:t>
+              <a:t>11/23/2024</a:t>
             </a:fld>
             <a:endParaRPr lang="en-US"/>
           </a:p>
@@ -2128,7 +2128,7 @@
           </a:lstStyle>
           <a:p>
             <a:r>
-              <a:rPr lang="en-US" altLang="zh-TW" smtClean="0"/>
+              <a:rPr lang="en-US" altLang="zh-TW"/>
               <a:t>Click to edit Master title style</a:t>
             </a:r>
             <a:endParaRPr lang="zh-TW" altLang="en-US"/>
@@ -2185,35 +2185,35 @@
           <a:p>
             <a:pPr lvl="0"/>
             <a:r>
-              <a:rPr lang="en-US" altLang="zh-TW" smtClean="0"/>
+              <a:rPr lang="en-US" altLang="zh-TW"/>
               <a:t>Edit Master text styles</a:t>
             </a:r>
           </a:p>
           <a:p>
             <a:pPr lvl="1"/>
             <a:r>
-              <a:rPr lang="en-US" altLang="zh-TW" smtClean="0"/>
+              <a:rPr lang="en-US" altLang="zh-TW"/>
               <a:t>Second level</a:t>
             </a:r>
           </a:p>
           <a:p>
             <a:pPr lvl="2"/>
             <a:r>
-              <a:rPr lang="en-US" altLang="zh-TW" smtClean="0"/>
+              <a:rPr lang="en-US" altLang="zh-TW"/>
               <a:t>Third level</a:t>
             </a:r>
           </a:p>
           <a:p>
             <a:pPr lvl="3"/>
             <a:r>
-              <a:rPr lang="en-US" altLang="zh-TW" smtClean="0"/>
+              <a:rPr lang="en-US" altLang="zh-TW"/>
               <a:t>Fourth level</a:t>
             </a:r>
           </a:p>
           <a:p>
             <a:pPr lvl="4"/>
             <a:r>
-              <a:rPr lang="en-US" altLang="zh-TW" smtClean="0"/>
+              <a:rPr lang="en-US" altLang="zh-TW"/>
               <a:t>Fifth level</a:t>
             </a:r>
             <a:endParaRPr lang="zh-TW" altLang="en-US"/>
@@ -2279,7 +2279,7 @@
           <a:p>
             <a:pPr lvl="0"/>
             <a:r>
-              <a:rPr lang="en-US" altLang="zh-TW" smtClean="0"/>
+              <a:rPr lang="en-US" altLang="zh-TW"/>
               <a:t>Edit Master text styles</a:t>
             </a:r>
           </a:p>
@@ -2303,7 +2303,7 @@
             <a:fld id="{9898E65E-5E56-4F09-9AEE-13AF2F5B087E}" type="datetimeFigureOut">
               <a:rPr lang="en-US" smtClean="0"/>
               <a:pPr/>
-              <a:t>11/26/2022</a:t>
+              <a:t>11/23/2024</a:t>
             </a:fld>
             <a:endParaRPr lang="en-US"/>
           </a:p>
@@ -2407,7 +2407,7 @@
           </a:lstStyle>
           <a:p>
             <a:r>
-              <a:rPr lang="en-US" altLang="zh-TW" smtClean="0"/>
+              <a:rPr lang="en-US" altLang="zh-TW"/>
               <a:t>Click to edit Master title style</a:t>
             </a:r>
             <a:endParaRPr lang="zh-TW" altLang="en-US"/>
@@ -2472,7 +2472,7 @@
           </a:lstStyle>
           <a:p>
             <a:r>
-              <a:rPr lang="en-US" altLang="zh-TW" smtClean="0"/>
+              <a:rPr lang="en-US" altLang="zh-TW"/>
               <a:t>Click icon to add picture</a:t>
             </a:r>
             <a:endParaRPr lang="zh-TW" altLang="en-US"/>
@@ -2538,7 +2538,7 @@
           <a:p>
             <a:pPr lvl="0"/>
             <a:r>
-              <a:rPr lang="en-US" altLang="zh-TW" smtClean="0"/>
+              <a:rPr lang="en-US" altLang="zh-TW"/>
               <a:t>Edit Master text styles</a:t>
             </a:r>
           </a:p>
@@ -2562,7 +2562,7 @@
             <a:fld id="{9898E65E-5E56-4F09-9AEE-13AF2F5B087E}" type="datetimeFigureOut">
               <a:rPr lang="en-US" smtClean="0"/>
               <a:pPr/>
-              <a:t>11/26/2022</a:t>
+              <a:t>11/23/2024</a:t>
             </a:fld>
             <a:endParaRPr lang="en-US"/>
           </a:p>
@@ -2677,10 +2677,9 @@
           <a:lstStyle/>
           <a:p>
             <a:r>
-              <a:rPr lang="zh-TW" altLang="en-US" smtClean="0"/>
+              <a:rPr lang="zh-TW" altLang="en-US"/>
               <a:t>按一下以編輯母片標題樣式</a:t>
             </a:r>
-            <a:endParaRPr lang="zh-TW" altLang="en-US"/>
           </a:p>
         </p:txBody>
       </p:sp>
@@ -2711,38 +2710,37 @@
           <a:p>
             <a:pPr lvl="0"/>
             <a:r>
-              <a:rPr lang="zh-TW" altLang="en-US" smtClean="0"/>
+              <a:rPr lang="zh-TW" altLang="en-US"/>
               <a:t>按一下以編輯母片文字樣式</a:t>
             </a:r>
           </a:p>
           <a:p>
             <a:pPr lvl="1"/>
             <a:r>
-              <a:rPr lang="zh-TW" altLang="en-US" smtClean="0"/>
+              <a:rPr lang="zh-TW" altLang="en-US"/>
               <a:t>第二層</a:t>
             </a:r>
           </a:p>
           <a:p>
             <a:pPr lvl="2"/>
             <a:r>
-              <a:rPr lang="zh-TW" altLang="en-US" smtClean="0"/>
+              <a:rPr lang="zh-TW" altLang="en-US"/>
               <a:t>第三層</a:t>
             </a:r>
           </a:p>
           <a:p>
             <a:pPr lvl="3"/>
             <a:r>
-              <a:rPr lang="zh-TW" altLang="en-US" smtClean="0"/>
+              <a:rPr lang="zh-TW" altLang="en-US"/>
               <a:t>第四層</a:t>
             </a:r>
           </a:p>
           <a:p>
             <a:pPr lvl="4"/>
             <a:r>
-              <a:rPr lang="zh-TW" altLang="en-US" smtClean="0"/>
+              <a:rPr lang="zh-TW" altLang="en-US"/>
               <a:t>第五層</a:t>
             </a:r>
-            <a:endParaRPr lang="zh-TW" altLang="en-US"/>
           </a:p>
         </p:txBody>
       </p:sp>
@@ -2782,7 +2780,7 @@
             <a:fld id="{9898E65E-5E56-4F09-9AEE-13AF2F5B087E}" type="datetimeFigureOut">
               <a:rPr lang="en-US" smtClean="0"/>
               <a:pPr/>
-              <a:t>11/26/2022</a:t>
+              <a:t>11/23/2024</a:t>
             </a:fld>
             <a:endParaRPr lang="en-US"/>
           </a:p>
@@ -3181,7 +3179,7 @@
           <a:lstStyle/>
           <a:p>
             <a:r>
-              <a:rPr lang="zh-TW" altLang="en-US" sz="7200" b="1" i="1" dirty="0" smtClean="0">
+              <a:rPr lang="zh-TW" altLang="en-US" sz="7200" b="1" i="1" dirty="0">
                 <a:solidFill>
                   <a:srgbClr val="660033"/>
                 </a:solidFill>
@@ -3195,24 +3193,7 @@
                 <a:latin typeface="微軟正黑體" pitchFamily="34" charset="-120"/>
                 <a:ea typeface="微軟正黑體" pitchFamily="34" charset="-120"/>
               </a:rPr>
-              <a:t>問</a:t>
-            </a:r>
-            <a:r>
-              <a:rPr lang="zh-TW" altLang="en-US" sz="7200" b="1" i="1" dirty="0">
-                <a:solidFill>
-                  <a:srgbClr val="660033"/>
-                </a:solidFill>
-                <a:effectLst>
-                  <a:outerShdw blurRad="38100" dist="38100" dir="2700000" algn="tl">
-                    <a:srgbClr val="000000">
-                      <a:alpha val="43137"/>
-                    </a:srgbClr>
-                  </a:outerShdw>
-                </a:effectLst>
-                <a:latin typeface="微軟正黑體" pitchFamily="34" charset="-120"/>
-                <a:ea typeface="微軟正黑體" pitchFamily="34" charset="-120"/>
-              </a:rPr>
-              <a:t>我主恩有幾多</a:t>
+              <a:t>問我主恩有幾多</a:t>
             </a:r>
           </a:p>
         </p:txBody>
@@ -3227,13 +3208,6 @@
   <p:clrMapOvr>
     <a:masterClrMapping/>
   </p:clrMapOvr>
-  <p:timing>
-    <p:tnLst>
-      <p:par>
-        <p:cTn id="1" dur="indefinite" restart="never" nodeType="tmRoot"/>
-      </p:par>
-    </p:tnLst>
-  </p:timing>
 </p:sld>
 </file>
 
@@ -3302,27 +3276,17 @@
               <a:buNone/>
             </a:pPr>
             <a:r>
-              <a:rPr lang="zh-TW" altLang="en-US" sz="6400" b="1">
+              <a:rPr lang="zh-TW" altLang="en-US" sz="6400" b="1" dirty="0">
                 <a:solidFill>
                   <a:srgbClr val="660033"/>
                 </a:solidFill>
                 <a:latin typeface="Microsoft JhengHei" panose="020B0604030504040204" pitchFamily="34" charset="-120"/>
                 <a:ea typeface="Microsoft JhengHei" panose="020B0604030504040204" pitchFamily="34" charset="-120"/>
               </a:rPr>
-              <a:t>像</a:t>
-            </a:r>
-            <a:r>
-              <a:rPr lang="zh-TW" altLang="en-US" sz="6400" b="1" smtClean="0">
-                <a:solidFill>
-                  <a:srgbClr val="660033"/>
-                </a:solidFill>
-                <a:latin typeface="Microsoft JhengHei" panose="020B0604030504040204" pitchFamily="34" charset="-120"/>
-                <a:ea typeface="Microsoft JhengHei" panose="020B0604030504040204" pitchFamily="34" charset="-120"/>
-              </a:rPr>
-              <a:t>幽</a:t>
-            </a:r>
-            <a:r>
-              <a:rPr lang="zh-CN" altLang="en-US" sz="6400" b="1" smtClean="0">
+              <a:t>像幽</a:t>
+            </a:r>
+            <a:r>
+              <a:rPr lang="zh-CN" altLang="en-US" sz="6400" b="1" dirty="0">
                 <a:solidFill>
                   <a:srgbClr val="660033"/>
                 </a:solidFill>
@@ -3332,24 +3296,14 @@
               <a:t>谷</a:t>
             </a:r>
             <a:r>
-              <a:rPr lang="zh-TW" altLang="en-US" sz="6400" b="1" dirty="0" smtClean="0">
+              <a:rPr lang="zh-TW" altLang="en-US" sz="6400" b="1" dirty="0">
                 <a:solidFill>
                   <a:srgbClr val="660033"/>
                 </a:solidFill>
                 <a:latin typeface="Microsoft JhengHei" panose="020B0604030504040204" pitchFamily="34" charset="-120"/>
                 <a:ea typeface="Microsoft JhengHei" panose="020B0604030504040204" pitchFamily="34" charset="-120"/>
               </a:rPr>
-              <a:t>走</a:t>
-            </a:r>
-            <a:r>
-              <a:rPr lang="zh-TW" altLang="en-US" sz="6400" b="1" dirty="0">
-                <a:solidFill>
-                  <a:srgbClr val="660033"/>
-                </a:solidFill>
-                <a:latin typeface="Microsoft JhengHei" panose="020B0604030504040204" pitchFamily="34" charset="-120"/>
-                <a:ea typeface="Microsoft JhengHei" panose="020B0604030504040204" pitchFamily="34" charset="-120"/>
-              </a:rPr>
-              <a:t>過  愁  憎  厭煩</a:t>
+              <a:t>走過  愁  憎  厭煩恨怨多 </a:t>
             </a:r>
             <a:endParaRPr lang="en-US" altLang="zh-TW" sz="6400" b="1" dirty="0">
               <a:solidFill>
@@ -3391,25 +3345,7 @@
                 </a:solidFill>
                 <a:effectLst/>
               </a:rPr>
-              <a:t>( </a:t>
-            </a:r>
-            <a:r>
-              <a:rPr lang="en-US" sz="4400" b="1" dirty="0" smtClean="0">
-                <a:solidFill>
-                  <a:srgbClr val="660033"/>
-                </a:solidFill>
-                <a:effectLst/>
-              </a:rPr>
-              <a:t>2 </a:t>
-            </a:r>
-            <a:r>
-              <a:rPr lang="en-US" sz="4400" b="1" dirty="0">
-                <a:solidFill>
-                  <a:srgbClr val="660033"/>
-                </a:solidFill>
-                <a:effectLst/>
-              </a:rPr>
-              <a:t>)</a:t>
+              <a:t>( 2 )</a:t>
             </a:r>
             <a:endParaRPr lang="vi-VN" sz="4400" b="1" dirty="0">
               <a:solidFill>
@@ -3430,13 +3366,6 @@
   <p:clrMapOvr>
     <a:masterClrMapping/>
   </p:clrMapOvr>
-  <p:timing>
-    <p:tnLst>
-      <p:par>
-        <p:cTn id="1" dur="indefinite" restart="never" nodeType="tmRoot"/>
-      </p:par>
-    </p:tnLst>
-  </p:timing>
 </p:sld>
 </file>
 
@@ -3490,7 +3419,7 @@
                 <a:latin typeface="Microsoft JhengHei" panose="020B0604030504040204" pitchFamily="34" charset="-120"/>
                 <a:ea typeface="Microsoft JhengHei" panose="020B0604030504040204" pitchFamily="34" charset="-120"/>
               </a:rPr>
-              <a:t>恨怨多  憑著信懊悔改過</a:t>
+              <a:t>憑著信懊悔改過</a:t>
             </a:r>
             <a:endParaRPr lang="en-US" altLang="zh-TW" sz="6400" b="1" dirty="0">
               <a:solidFill>
@@ -3547,25 +3476,7 @@
                 </a:solidFill>
                 <a:effectLst/>
               </a:rPr>
-              <a:t>( </a:t>
-            </a:r>
-            <a:r>
-              <a:rPr lang="en-US" sz="4400" b="1" dirty="0" smtClean="0">
-                <a:solidFill>
-                  <a:srgbClr val="660033"/>
-                </a:solidFill>
-                <a:effectLst/>
-              </a:rPr>
-              <a:t>2 </a:t>
-            </a:r>
-            <a:r>
-              <a:rPr lang="en-US" sz="4400" b="1" dirty="0">
-                <a:solidFill>
-                  <a:srgbClr val="660033"/>
-                </a:solidFill>
-                <a:effectLst/>
-              </a:rPr>
-              <a:t>)</a:t>
+              <a:t>( 2 )</a:t>
             </a:r>
             <a:endParaRPr lang="vi-VN" sz="4400" b="1" dirty="0">
               <a:solidFill>
@@ -3586,13 +3497,6 @@
   <p:clrMapOvr>
     <a:masterClrMapping/>
   </p:clrMapOvr>
-  <p:timing>
-    <p:tnLst>
-      <p:par>
-        <p:cTn id="1" dur="indefinite" restart="never" nodeType="tmRoot"/>
-      </p:par>
-    </p:tnLst>
-  </p:timing>
 </p:sld>
 </file>
 
@@ -3710,25 +3614,7 @@
                 </a:solidFill>
                 <a:effectLst/>
               </a:rPr>
-              <a:t>( </a:t>
-            </a:r>
-            <a:r>
-              <a:rPr lang="en-US" sz="4400" b="1" dirty="0" smtClean="0">
-                <a:solidFill>
-                  <a:srgbClr val="660033"/>
-                </a:solidFill>
-                <a:effectLst/>
-              </a:rPr>
-              <a:t>3 </a:t>
-            </a:r>
-            <a:r>
-              <a:rPr lang="en-US" sz="4400" b="1" dirty="0">
-                <a:solidFill>
-                  <a:srgbClr val="660033"/>
-                </a:solidFill>
-                <a:effectLst/>
-              </a:rPr>
-              <a:t>)</a:t>
+              <a:t>( 3 )</a:t>
             </a:r>
             <a:endParaRPr lang="vi-VN" sz="4400" b="1" dirty="0">
               <a:solidFill>
@@ -3749,13 +3635,6 @@
   <p:clrMapOvr>
     <a:masterClrMapping/>
   </p:clrMapOvr>
-  <p:timing>
-    <p:tnLst>
-      <p:par>
-        <p:cTn id="1" dur="indefinite" restart="never" nodeType="tmRoot"/>
-      </p:par>
-    </p:tnLst>
-  </p:timing>
 </p:sld>
 </file>
 
@@ -3873,25 +3752,7 @@
                 </a:solidFill>
                 <a:effectLst/>
               </a:rPr>
-              <a:t>( </a:t>
-            </a:r>
-            <a:r>
-              <a:rPr lang="en-US" sz="4400" b="1" dirty="0" smtClean="0">
-                <a:solidFill>
-                  <a:srgbClr val="660033"/>
-                </a:solidFill>
-                <a:effectLst/>
-              </a:rPr>
-              <a:t>3 </a:t>
-            </a:r>
-            <a:r>
-              <a:rPr lang="en-US" sz="4400" b="1" dirty="0">
-                <a:solidFill>
-                  <a:srgbClr val="660033"/>
-                </a:solidFill>
-                <a:effectLst/>
-              </a:rPr>
-              <a:t>)</a:t>
+              <a:t>( 3 )</a:t>
             </a:r>
             <a:endParaRPr lang="vi-VN" sz="4400" b="1" dirty="0">
               <a:solidFill>
@@ -3912,13 +3773,6 @@
   <p:clrMapOvr>
     <a:masterClrMapping/>
   </p:clrMapOvr>
-  <p:timing>
-    <p:tnLst>
-      <p:par>
-        <p:cTn id="1" dur="indefinite" restart="never" nodeType="tmRoot"/>
-      </p:par>
-    </p:tnLst>
-  </p:timing>
 </p:sld>
 </file>
 
@@ -4036,25 +3890,7 @@
                 </a:solidFill>
                 <a:effectLst/>
               </a:rPr>
-              <a:t>( </a:t>
-            </a:r>
-            <a:r>
-              <a:rPr lang="en-US" sz="4400" b="1" dirty="0" smtClean="0">
-                <a:solidFill>
-                  <a:srgbClr val="660033"/>
-                </a:solidFill>
-                <a:effectLst/>
-              </a:rPr>
-              <a:t>3 </a:t>
-            </a:r>
-            <a:r>
-              <a:rPr lang="en-US" sz="4400" b="1" dirty="0">
-                <a:solidFill>
-                  <a:srgbClr val="660033"/>
-                </a:solidFill>
-                <a:effectLst/>
-              </a:rPr>
-              <a:t>)</a:t>
+              <a:t>( 3 )</a:t>
             </a:r>
             <a:endParaRPr lang="vi-VN" sz="4400" b="1" dirty="0">
               <a:solidFill>
@@ -4075,13 +3911,6 @@
   <p:clrMapOvr>
     <a:masterClrMapping/>
   </p:clrMapOvr>
-  <p:timing>
-    <p:tnLst>
-      <p:par>
-        <p:cTn id="1" dur="indefinite" restart="never" nodeType="tmRoot"/>
-      </p:par>
-    </p:tnLst>
-  </p:timing>
 </p:sld>
 </file>
 
@@ -4192,25 +4021,7 @@
                 </a:solidFill>
                 <a:effectLst/>
               </a:rPr>
-              <a:t>( </a:t>
-            </a:r>
-            <a:r>
-              <a:rPr lang="en-US" sz="4400" b="1" dirty="0" smtClean="0">
-                <a:solidFill>
-                  <a:srgbClr val="660033"/>
-                </a:solidFill>
-                <a:effectLst/>
-              </a:rPr>
-              <a:t>3 </a:t>
-            </a:r>
-            <a:r>
-              <a:rPr lang="en-US" sz="4400" b="1" dirty="0">
-                <a:solidFill>
-                  <a:srgbClr val="660033"/>
-                </a:solidFill>
-                <a:effectLst/>
-              </a:rPr>
-              <a:t>)</a:t>
+              <a:t>( 3 )</a:t>
             </a:r>
             <a:endParaRPr lang="vi-VN" sz="4400" b="1" dirty="0">
               <a:solidFill>
@@ -4231,13 +4042,6 @@
   <p:clrMapOvr>
     <a:masterClrMapping/>
   </p:clrMapOvr>
-  <p:timing>
-    <p:tnLst>
-      <p:par>
-        <p:cTn id="1" dur="indefinite" restart="never" nodeType="tmRoot"/>
-      </p:par>
-    </p:tnLst>
-  </p:timing>
 </p:sld>
 </file>
 
@@ -4376,13 +4180,6 @@
   <p:clrMapOvr>
     <a:masterClrMapping/>
   </p:clrMapOvr>
-  <p:timing>
-    <p:tnLst>
-      <p:par>
-        <p:cTn id="1" dur="indefinite" restart="never" nodeType="tmRoot"/>
-      </p:par>
-    </p:tnLst>
-  </p:timing>
 </p:sld>
 </file>
 
@@ -4521,13 +4318,6 @@
   <p:clrMapOvr>
     <a:masterClrMapping/>
   </p:clrMapOvr>
-  <p:timing>
-    <p:tnLst>
-      <p:par>
-        <p:cTn id="1" dur="indefinite" restart="never" nodeType="tmRoot"/>
-      </p:par>
-    </p:tnLst>
-  </p:timing>
 </p:sld>
 </file>
 
@@ -4659,13 +4449,6 @@
   <p:clrMapOvr>
     <a:masterClrMapping/>
   </p:clrMapOvr>
-  <p:timing>
-    <p:tnLst>
-      <p:par>
-        <p:cTn id="1" dur="indefinite" restart="never" nodeType="tmRoot"/>
-      </p:par>
-    </p:tnLst>
-  </p:timing>
 </p:sld>
 </file>
 
@@ -4817,13 +4600,6 @@
   <p:clrMapOvr>
     <a:masterClrMapping/>
   </p:clrMapOvr>
-  <p:timing>
-    <p:tnLst>
-      <p:par>
-        <p:cTn id="1" dur="indefinite" restart="never" nodeType="tmRoot"/>
-      </p:par>
-    </p:tnLst>
-  </p:timing>
 </p:sld>
 </file>
 
@@ -4948,13 +4724,6 @@
   <p:clrMapOvr>
     <a:masterClrMapping/>
   </p:clrMapOvr>
-  <p:timing>
-    <p:tnLst>
-      <p:par>
-        <p:cTn id="1" dur="indefinite" restart="never" nodeType="tmRoot"/>
-      </p:par>
-    </p:tnLst>
-  </p:timing>
 </p:sld>
 </file>
 
@@ -5072,25 +4841,7 @@
                 </a:solidFill>
                 <a:effectLst/>
               </a:rPr>
-              <a:t>( </a:t>
-            </a:r>
-            <a:r>
-              <a:rPr lang="en-US" sz="4400" b="1" dirty="0" smtClean="0">
-                <a:solidFill>
-                  <a:srgbClr val="660033"/>
-                </a:solidFill>
-                <a:effectLst/>
-              </a:rPr>
-              <a:t>2 </a:t>
-            </a:r>
-            <a:r>
-              <a:rPr lang="en-US" sz="4400" b="1" dirty="0">
-                <a:solidFill>
-                  <a:srgbClr val="660033"/>
-                </a:solidFill>
-                <a:effectLst/>
-              </a:rPr>
-              <a:t>)</a:t>
+              <a:t>( 2 )</a:t>
             </a:r>
             <a:endParaRPr lang="vi-VN" sz="4400" b="1" dirty="0">
               <a:solidFill>
@@ -5111,13 +4862,6 @@
   <p:clrMapOvr>
     <a:masterClrMapping/>
   </p:clrMapOvr>
-  <p:timing>
-    <p:tnLst>
-      <p:par>
-        <p:cTn id="1" dur="indefinite" restart="never" nodeType="tmRoot"/>
-      </p:par>
-    </p:tnLst>
-  </p:timing>
 </p:sld>
 </file>
 
@@ -5255,25 +4999,7 @@
                 </a:solidFill>
                 <a:effectLst/>
               </a:rPr>
-              <a:t>( </a:t>
-            </a:r>
-            <a:r>
-              <a:rPr lang="en-US" sz="4400" b="1" dirty="0" smtClean="0">
-                <a:solidFill>
-                  <a:srgbClr val="660033"/>
-                </a:solidFill>
-                <a:effectLst/>
-              </a:rPr>
-              <a:t>2 </a:t>
-            </a:r>
-            <a:r>
-              <a:rPr lang="en-US" sz="4400" b="1" dirty="0">
-                <a:solidFill>
-                  <a:srgbClr val="660033"/>
-                </a:solidFill>
-                <a:effectLst/>
-              </a:rPr>
-              <a:t>)</a:t>
+              <a:t>( 2 )</a:t>
             </a:r>
             <a:endParaRPr lang="vi-VN" sz="4400" b="1" dirty="0">
               <a:solidFill>
@@ -5294,13 +5020,6 @@
   <p:clrMapOvr>
     <a:masterClrMapping/>
   </p:clrMapOvr>
-  <p:timing>
-    <p:tnLst>
-      <p:par>
-        <p:cTn id="1" dur="indefinite" restart="never" nodeType="tmRoot"/>
-      </p:par>
-    </p:tnLst>
-  </p:timing>
 </p:sld>
 </file>
 
@@ -5434,25 +5153,7 @@
                 </a:solidFill>
                 <a:effectLst/>
               </a:rPr>
-              <a:t>( </a:t>
-            </a:r>
-            <a:r>
-              <a:rPr lang="en-US" sz="4400" b="1" dirty="0" smtClean="0">
-                <a:solidFill>
-                  <a:srgbClr val="660033"/>
-                </a:solidFill>
-                <a:effectLst/>
-              </a:rPr>
-              <a:t>2 </a:t>
-            </a:r>
-            <a:r>
-              <a:rPr lang="en-US" sz="4400" b="1" dirty="0">
-                <a:solidFill>
-                  <a:srgbClr val="660033"/>
-                </a:solidFill>
-                <a:effectLst/>
-              </a:rPr>
-              <a:t>)</a:t>
+              <a:t>( 2 )</a:t>
             </a:r>
             <a:endParaRPr lang="vi-VN" sz="4400" b="1" dirty="0">
               <a:solidFill>
@@ -5473,13 +5174,6 @@
   <p:clrMapOvr>
     <a:masterClrMapping/>
   </p:clrMapOvr>
-  <p:timing>
-    <p:tnLst>
-      <p:par>
-        <p:cTn id="1" dur="indefinite" restart="never" nodeType="tmRoot"/>
-      </p:par>
-    </p:tnLst>
-  </p:timing>
 </p:sld>
 </file>
 
